--- a/chicago_crash_presentation.pptx
+++ b/chicago_crash_presentation.pptx
@@ -6604,29 +6604,13 @@
           <a:p>
             <a:r>
               <a:rPr lang="en-US" dirty="0"/>
-              <a:t>Traffic accidents are a </a:t>
-            </a:r>
-            <a:r>
-              <a:rPr lang="en-US" dirty="0" err="1"/>
-              <a:t>mojor</a:t>
-            </a:r>
+              <a:t>Traffic accidents are a major concern in Chicago. Understanding the conditions that lead to severe crashes will help the Vehicle safety board.</a:t>
+            </a:r>
+          </a:p>
+          <a:p>
             <a:r>
               <a:rPr lang="en-US" dirty="0"/>
-              <a:t> concern in Chicago. Understanding the conditions that lead to severe crashes will help the Vehicle safety board.</a:t>
-            </a:r>
-          </a:p>
-          <a:p>
-            <a:r>
-              <a:rPr lang="en-US" dirty="0"/>
-              <a:t>This project aims to build a classification model that predicts whether a car crash will result in injuries based on environmental factors or other factors. The insights from this model will help identify high risk conditions and implement preventive measures </a:t>
-            </a:r>
-            <a:r>
-              <a:rPr lang="en-US"/>
-              <a:t>to improve </a:t>
-            </a:r>
-            <a:r>
-              <a:rPr lang="en-US" dirty="0"/>
-              <a:t>road safety.</a:t>
+              <a:t>This project aims to build a classification model that predicts whether a car crash will result in injuries based on environmental factors or other factors. The insights from this model will help identify high risk conditions and implement preventive measures to improve road safety.</a:t>
             </a:r>
             <a:br>
               <a:rPr lang="en-US" dirty="0"/>

--- a/chicago_crash_presentation.pptx
+++ b/chicago_crash_presentation.pptx
@@ -15,9 +15,10 @@
     <p:sldId id="263" r:id="rId9"/>
     <p:sldId id="264" r:id="rId10"/>
     <p:sldId id="266" r:id="rId11"/>
-    <p:sldId id="267" r:id="rId12"/>
-    <p:sldId id="268" r:id="rId13"/>
-    <p:sldId id="269" r:id="rId14"/>
+    <p:sldId id="270" r:id="rId12"/>
+    <p:sldId id="267" r:id="rId13"/>
+    <p:sldId id="268" r:id="rId14"/>
+    <p:sldId id="269" r:id="rId15"/>
   </p:sldIdLst>
   <p:sldSz cx="9144000" cy="6858000" type="screen4x3"/>
   <p:notesSz cx="6858000" cy="9144000"/>
@@ -6235,7 +6236,13 @@
       </p:grpSpPr>
       <p:sp>
         <p:nvSpPr>
-          <p:cNvPr id="2" name="Title 1"/>
+          <p:cNvPr id="2" name="Title 1">
+            <a:extLst>
+              <a:ext uri="{FF2B5EF4-FFF2-40B4-BE49-F238E27FC236}">
+                <a16:creationId xmlns:a16="http://schemas.microsoft.com/office/drawing/2014/main" id="{382882CB-F403-1A16-781A-BD5AD3F70E67}"/>
+              </a:ext>
+            </a:extLst>
+          </p:cNvPr>
           <p:cNvSpPr>
             <a:spLocks noGrp="1"/>
           </p:cNvSpPr>
@@ -6249,100 +6256,51 @@
           <a:lstStyle/>
           <a:p>
             <a:r>
-              <a:t>Recommendations</a:t>
-            </a:r>
-          </a:p>
-        </p:txBody>
-      </p:sp>
-      <p:sp>
-        <p:nvSpPr>
-          <p:cNvPr id="3" name="Content Placeholder 2"/>
-          <p:cNvSpPr>
-            <a:spLocks noGrp="1"/>
-          </p:cNvSpPr>
+              <a:rPr lang="en-US" dirty="0"/>
+              <a:t>Top predictors plot</a:t>
+            </a:r>
+            <a:endParaRPr lang="en-KE" dirty="0"/>
+          </a:p>
+        </p:txBody>
+      </p:sp>
+      <p:pic>
+        <p:nvPicPr>
+          <p:cNvPr id="5" name="Content Placeholder 4">
+            <a:extLst>
+              <a:ext uri="{FF2B5EF4-FFF2-40B4-BE49-F238E27FC236}">
+                <a16:creationId xmlns:a16="http://schemas.microsoft.com/office/drawing/2014/main" id="{F9CD4983-A862-7AA8-3509-4B5C30770620}"/>
+              </a:ext>
+            </a:extLst>
+          </p:cNvPr>
+          <p:cNvPicPr>
+            <a:picLocks noGrp="1" noChangeAspect="1"/>
+          </p:cNvPicPr>
           <p:nvPr>
             <p:ph idx="1"/>
           </p:nvPr>
-        </p:nvSpPr>
+        </p:nvPicPr>
+        <p:blipFill>
+          <a:blip r:embed="rId2"/>
+          <a:stretch>
+            <a:fillRect/>
+          </a:stretch>
+        </p:blipFill>
         <p:spPr>
           <a:xfrm>
-            <a:off x="716691" y="1930400"/>
-            <a:ext cx="6347714" cy="3880773"/>
+            <a:off x="609600" y="2304897"/>
+            <a:ext cx="6348413" cy="3592819"/>
           </a:xfrm>
+          <a:prstGeom prst="rect">
+            <a:avLst/>
+          </a:prstGeom>
         </p:spPr>
-        <p:txBody>
-          <a:bodyPr>
-            <a:normAutofit fontScale="85000" lnSpcReduction="10000"/>
-          </a:bodyPr>
-          <a:lstStyle/>
-          <a:p>
-            <a:r>
-              <a:rPr lang="en-US" dirty="0"/>
-              <a:t>1. Since </a:t>
-            </a:r>
-            <a:r>
-              <a:rPr lang="en-US" dirty="0" err="1"/>
-              <a:t>num_vehicles_in_crash</a:t>
-            </a:r>
-            <a:r>
-              <a:rPr lang="en-US" dirty="0"/>
-              <a:t> is your strongest predictor, the city should prioritize on conflict point reduction. By converting high crash intersections into  round abouts or adding more signals. This will slow the speed of the cars and drivers will have ample time for reaction as well as reduce the number of injuries</a:t>
-            </a:r>
-          </a:p>
-          <a:p>
-            <a:r>
-              <a:rPr lang="en-US" dirty="0"/>
-              <a:t>.2. For location safety, because </a:t>
-            </a:r>
-            <a:r>
-              <a:rPr lang="en-US" dirty="0" err="1"/>
-              <a:t>lattitude</a:t>
-            </a:r>
-            <a:r>
-              <a:rPr lang="en-US" dirty="0"/>
-              <a:t> is a significant, the city should investigate the specific streets within the high risk </a:t>
-            </a:r>
-            <a:r>
-              <a:rPr lang="en-US" dirty="0" err="1"/>
-              <a:t>lattitude</a:t>
-            </a:r>
-            <a:r>
-              <a:rPr lang="en-US" dirty="0"/>
-              <a:t> zones. Then enforce speed cameras or increased patrols officers.</a:t>
-            </a:r>
-          </a:p>
-          <a:p>
-            <a:r>
-              <a:rPr lang="en-US" dirty="0"/>
-              <a:t>3. The city should issue amber alerts when there are changes in weather conditions, because different drivers react differently as well as focus on </a:t>
-            </a:r>
-            <a:r>
-              <a:rPr lang="en-US" dirty="0" err="1"/>
-              <a:t>infustructure</a:t>
-            </a:r>
-            <a:r>
-              <a:rPr lang="en-US" dirty="0"/>
-              <a:t> </a:t>
-            </a:r>
-            <a:r>
-              <a:rPr lang="en-US" dirty="0" err="1"/>
-              <a:t>diring</a:t>
-            </a:r>
-            <a:r>
-              <a:rPr lang="en-US" dirty="0"/>
-              <a:t> these weather changes</a:t>
-            </a:r>
-          </a:p>
-          <a:p>
-            <a:r>
-              <a:rPr lang="en-US" dirty="0"/>
-              <a:t>4. The city should integrate an emergency dispatch system. This is because we a 69% recall, which flags when a crash is likely to have an injury. </a:t>
-            </a:r>
-            <a:endParaRPr dirty="0"/>
-          </a:p>
-        </p:txBody>
-      </p:sp>
+      </p:pic>
     </p:spTree>
+    <p:extLst>
+      <p:ext uri="{BB962C8B-B14F-4D97-AF65-F5344CB8AC3E}">
+        <p14:creationId xmlns:p14="http://schemas.microsoft.com/office/powerpoint/2010/main" val="2984537483"/>
+      </p:ext>
+    </p:extLst>
   </p:cSld>
   <p:clrMapOvr>
     <a:masterClrMapping/>
@@ -6383,7 +6341,7 @@
           <a:lstStyle/>
           <a:p>
             <a:r>
-              <a:t>Conclusion</a:t>
+              <a:t>Recommendations</a:t>
             </a:r>
           </a:p>
         </p:txBody>
@@ -6398,14 +6356,35 @@
             <p:ph idx="1"/>
           </p:nvPr>
         </p:nvSpPr>
-        <p:spPr/>
-        <p:txBody>
-          <a:bodyPr/>
+        <p:spPr>
+          <a:xfrm>
+            <a:off x="716691" y="1930400"/>
+            <a:ext cx="6347714" cy="3880773"/>
+          </a:xfrm>
+        </p:spPr>
+        <p:txBody>
+          <a:bodyPr>
+            <a:normAutofit fontScale="85000" lnSpcReduction="10000"/>
+          </a:bodyPr>
           <a:lstStyle/>
           <a:p>
             <a:r>
               <a:rPr lang="en-US" dirty="0"/>
-              <a:t>While a standard model prioritizes on accuracy, we optimized for recall. The model reveals that the more the cars at in intersections the higher the impact of accidents. The city should focus on multi vehicle intersections within the high risk </a:t>
+              <a:t>1. Since </a:t>
+            </a:r>
+            <a:r>
+              <a:rPr lang="en-US" dirty="0" err="1"/>
+              <a:t>num_vehicles_in_crash</a:t>
+            </a:r>
+            <a:r>
+              <a:rPr lang="en-US" dirty="0"/>
+              <a:t> is your strongest predictor, the city should prioritize on conflict point reduction. By converting high crash intersections into  round abouts or adding more signals. This will slow the speed of the cars and drivers will have ample time for reaction as well as reduce the number of injuries</a:t>
+            </a:r>
+          </a:p>
+          <a:p>
+            <a:r>
+              <a:rPr lang="en-US" dirty="0"/>
+              <a:t>.2. For location safety, because </a:t>
             </a:r>
             <a:r>
               <a:rPr lang="en-US" dirty="0" err="1"/>
@@ -6413,7 +6392,43 @@
             </a:r>
             <a:r>
               <a:rPr lang="en-US" dirty="0"/>
-              <a:t> and the allocate resources where they will have immediate impact on saving lives</a:t>
+              <a:t> is a significant, the city should investigate the specific streets within the high risk </a:t>
+            </a:r>
+            <a:r>
+              <a:rPr lang="en-US" dirty="0" err="1"/>
+              <a:t>lattitude</a:t>
+            </a:r>
+            <a:r>
+              <a:rPr lang="en-US" dirty="0"/>
+              <a:t> zones. Then enforce speed cameras or increased patrols officers.</a:t>
+            </a:r>
+          </a:p>
+          <a:p>
+            <a:r>
+              <a:rPr lang="en-US" dirty="0"/>
+              <a:t>3. The city should issue amber alerts when there are changes in weather conditions, because different drivers react differently as well as focus on </a:t>
+            </a:r>
+            <a:r>
+              <a:rPr lang="en-US" dirty="0" err="1"/>
+              <a:t>infustructure</a:t>
+            </a:r>
+            <a:r>
+              <a:rPr lang="en-US" dirty="0"/>
+              <a:t> </a:t>
+            </a:r>
+            <a:r>
+              <a:rPr lang="en-US" dirty="0" err="1"/>
+              <a:t>diring</a:t>
+            </a:r>
+            <a:r>
+              <a:rPr lang="en-US" dirty="0"/>
+              <a:t> these weather changes</a:t>
+            </a:r>
+          </a:p>
+          <a:p>
+            <a:r>
+              <a:rPr lang="en-US" dirty="0"/>
+              <a:t>4. The city should integrate an emergency dispatch system. This is because we a 69% recall, which flags when a crash is likely to have an injury. </a:t>
             </a:r>
             <a:endParaRPr dirty="0"/>
           </a:p>
@@ -6428,6 +6443,83 @@
 </file>
 
 <file path=ppt/slides/slide13.xml><?xml version="1.0" encoding="utf-8"?>
+<p:sld xmlns:a="http://schemas.openxmlformats.org/drawingml/2006/main" xmlns:r="http://schemas.openxmlformats.org/officeDocument/2006/relationships" xmlns:p="http://schemas.openxmlformats.org/presentationml/2006/main">
+  <p:cSld>
+    <p:spTree>
+      <p:nvGrpSpPr>
+        <p:cNvPr id="1" name=""/>
+        <p:cNvGrpSpPr/>
+        <p:nvPr/>
+      </p:nvGrpSpPr>
+      <p:grpSpPr>
+        <a:xfrm>
+          <a:off x="0" y="0"/>
+          <a:ext cx="0" cy="0"/>
+          <a:chOff x="0" y="0"/>
+          <a:chExt cx="0" cy="0"/>
+        </a:xfrm>
+      </p:grpSpPr>
+      <p:sp>
+        <p:nvSpPr>
+          <p:cNvPr id="2" name="Title 1"/>
+          <p:cNvSpPr>
+            <a:spLocks noGrp="1"/>
+          </p:cNvSpPr>
+          <p:nvPr>
+            <p:ph type="title"/>
+          </p:nvPr>
+        </p:nvSpPr>
+        <p:spPr/>
+        <p:txBody>
+          <a:bodyPr/>
+          <a:lstStyle/>
+          <a:p>
+            <a:r>
+              <a:t>Conclusion</a:t>
+            </a:r>
+          </a:p>
+        </p:txBody>
+      </p:sp>
+      <p:sp>
+        <p:nvSpPr>
+          <p:cNvPr id="3" name="Content Placeholder 2"/>
+          <p:cNvSpPr>
+            <a:spLocks noGrp="1"/>
+          </p:cNvSpPr>
+          <p:nvPr>
+            <p:ph idx="1"/>
+          </p:nvPr>
+        </p:nvSpPr>
+        <p:spPr/>
+        <p:txBody>
+          <a:bodyPr/>
+          <a:lstStyle/>
+          <a:p>
+            <a:r>
+              <a:rPr lang="en-US" dirty="0"/>
+              <a:t>While a standard model prioritizes on accuracy, we optimized for recall. The model reveals that the more the cars at in intersections the higher the impact of accidents. The city should focus on multi vehicle intersections within the high risk </a:t>
+            </a:r>
+            <a:r>
+              <a:rPr lang="en-US" dirty="0" err="1"/>
+              <a:t>lattitude</a:t>
+            </a:r>
+            <a:r>
+              <a:rPr lang="en-US" dirty="0"/>
+              <a:t> and the allocate resources where they will have immediate impact on saving lives</a:t>
+            </a:r>
+            <a:endParaRPr dirty="0"/>
+          </a:p>
+        </p:txBody>
+      </p:sp>
+    </p:spTree>
+  </p:cSld>
+  <p:clrMapOvr>
+    <a:masterClrMapping/>
+  </p:clrMapOvr>
+</p:sld>
+</file>
+
+<file path=ppt/slides/slide14.xml><?xml version="1.0" encoding="utf-8"?>
 <p:sld xmlns:a="http://schemas.openxmlformats.org/drawingml/2006/main" xmlns:r="http://schemas.openxmlformats.org/officeDocument/2006/relationships" xmlns:p="http://schemas.openxmlformats.org/presentationml/2006/main">
   <p:cSld>
     <p:spTree>
